--- a/memo/オブジェクトたち.pptx
+++ b/memo/オブジェクトたち.pptx
@@ -7,7 +7,9 @@
   <p:sldIdLst>
     <p:sldId id="256" r:id="rId2"/>
     <p:sldId id="257" r:id="rId3"/>
-    <p:sldId id="258" r:id="rId4"/>
+    <p:sldId id="259" r:id="rId4"/>
+    <p:sldId id="258" r:id="rId5"/>
+    <p:sldId id="260" r:id="rId6"/>
   </p:sldIdLst>
   <p:sldSz cx="12192000" cy="6858000"/>
   <p:notesSz cx="6858000" cy="9144000"/>
@@ -106,7 +108,95 @@
       </a:defRPr>
     </a:lvl9pPr>
   </p:defaultTextStyle>
+  <p:extLst>
+    <p:ext uri="{EFAFB233-063F-42B5-8137-9DF3F51BA10A}">
+      <p15:sldGuideLst xmlns:p15="http://schemas.microsoft.com/office/powerpoint/2012/main"/>
+    </p:ext>
+  </p:extLst>
 </p:presentation>
+</file>
+
+<file path=ppt/changesInfos/changesInfo1.xml><?xml version="1.0" encoding="utf-8"?>
+<pc:chgInfo xmlns:a="http://schemas.openxmlformats.org/drawingml/2006/main" xmlns:r="http://schemas.openxmlformats.org/officeDocument/2006/relationships" xmlns:ac="http://schemas.microsoft.com/office/drawing/2013/main/command" xmlns:pc="http://schemas.microsoft.com/office/powerpoint/2013/main/command">
+  <pc:docChgLst>
+    <pc:chgData name="越智 統" userId="2de33d77-a65a-42d1-92e2-b40da65bb07e" providerId="ADAL" clId="{B7B19919-843A-40A1-91F6-6E2F9A5720D9}"/>
+    <pc:docChg chg="undo custSel addSld modSld">
+      <pc:chgData name="越智 統" userId="2de33d77-a65a-42d1-92e2-b40da65bb07e" providerId="ADAL" clId="{B7B19919-843A-40A1-91F6-6E2F9A5720D9}" dt="2026-03-13T04:24:54.933" v="143" actId="20577"/>
+      <pc:docMkLst>
+        <pc:docMk/>
+      </pc:docMkLst>
+      <pc:sldChg chg="modSp mod">
+        <pc:chgData name="越智 統" userId="2de33d77-a65a-42d1-92e2-b40da65bb07e" providerId="ADAL" clId="{B7B19919-843A-40A1-91F6-6E2F9A5720D9}" dt="2026-03-13T04:22:09.402" v="5" actId="20577"/>
+        <pc:sldMkLst>
+          <pc:docMk/>
+          <pc:sldMk cId="3938342112" sldId="257"/>
+        </pc:sldMkLst>
+        <pc:spChg chg="mod">
+          <ac:chgData name="越智 統" userId="2de33d77-a65a-42d1-92e2-b40da65bb07e" providerId="ADAL" clId="{B7B19919-843A-40A1-91F6-6E2F9A5720D9}" dt="2026-03-13T04:22:09.402" v="5" actId="20577"/>
+          <ac:spMkLst>
+            <pc:docMk/>
+            <pc:sldMk cId="3938342112" sldId="257"/>
+            <ac:spMk id="4" creationId="{1BE1DD8A-F7F3-357C-885A-EE33A81FBD8F}"/>
+          </ac:spMkLst>
+        </pc:spChg>
+      </pc:sldChg>
+      <pc:sldChg chg="modSp add mod">
+        <pc:chgData name="越智 統" userId="2de33d77-a65a-42d1-92e2-b40da65bb07e" providerId="ADAL" clId="{B7B19919-843A-40A1-91F6-6E2F9A5720D9}" dt="2026-03-13T04:24:25.702" v="128" actId="20577"/>
+        <pc:sldMkLst>
+          <pc:docMk/>
+          <pc:sldMk cId="473636867" sldId="259"/>
+        </pc:sldMkLst>
+        <pc:spChg chg="mod">
+          <ac:chgData name="越智 統" userId="2de33d77-a65a-42d1-92e2-b40da65bb07e" providerId="ADAL" clId="{B7B19919-843A-40A1-91F6-6E2F9A5720D9}" dt="2026-03-13T04:22:45.441" v="28" actId="14100"/>
+          <ac:spMkLst>
+            <pc:docMk/>
+            <pc:sldMk cId="473636867" sldId="259"/>
+            <ac:spMk id="4" creationId="{1CB185F5-1410-683C-385B-278E90D55837}"/>
+          </ac:spMkLst>
+        </pc:spChg>
+        <pc:spChg chg="mod">
+          <ac:chgData name="越智 統" userId="2de33d77-a65a-42d1-92e2-b40da65bb07e" providerId="ADAL" clId="{B7B19919-843A-40A1-91F6-6E2F9A5720D9}" dt="2026-03-13T04:23:15.650" v="58" actId="20577"/>
+          <ac:spMkLst>
+            <pc:docMk/>
+            <pc:sldMk cId="473636867" sldId="259"/>
+            <ac:spMk id="7" creationId="{DEDD9E04-762E-151B-28E2-0CD7D42C7B61}"/>
+          </ac:spMkLst>
+        </pc:spChg>
+        <pc:spChg chg="mod">
+          <ac:chgData name="越智 統" userId="2de33d77-a65a-42d1-92e2-b40da65bb07e" providerId="ADAL" clId="{B7B19919-843A-40A1-91F6-6E2F9A5720D9}" dt="2026-03-13T04:23:49.232" v="89" actId="20577"/>
+          <ac:spMkLst>
+            <pc:docMk/>
+            <pc:sldMk cId="473636867" sldId="259"/>
+            <ac:spMk id="9" creationId="{EBABEC24-B9D7-A156-3E48-3CA509B18E76}"/>
+          </ac:spMkLst>
+        </pc:spChg>
+        <pc:spChg chg="mod">
+          <ac:chgData name="越智 統" userId="2de33d77-a65a-42d1-92e2-b40da65bb07e" providerId="ADAL" clId="{B7B19919-843A-40A1-91F6-6E2F9A5720D9}" dt="2026-03-13T04:24:25.702" v="128" actId="20577"/>
+          <ac:spMkLst>
+            <pc:docMk/>
+            <pc:sldMk cId="473636867" sldId="259"/>
+            <ac:spMk id="10" creationId="{EE8E500C-9AF2-9591-0F56-AED224727E98}"/>
+          </ac:spMkLst>
+        </pc:spChg>
+      </pc:sldChg>
+      <pc:sldChg chg="modSp add mod">
+        <pc:chgData name="越智 統" userId="2de33d77-a65a-42d1-92e2-b40da65bb07e" providerId="ADAL" clId="{B7B19919-843A-40A1-91F6-6E2F9A5720D9}" dt="2026-03-13T04:24:54.933" v="143" actId="20577"/>
+        <pc:sldMkLst>
+          <pc:docMk/>
+          <pc:sldMk cId="1827292579" sldId="260"/>
+        </pc:sldMkLst>
+        <pc:spChg chg="mod">
+          <ac:chgData name="越智 統" userId="2de33d77-a65a-42d1-92e2-b40da65bb07e" providerId="ADAL" clId="{B7B19919-843A-40A1-91F6-6E2F9A5720D9}" dt="2026-03-13T04:24:54.933" v="143" actId="20577"/>
+          <ac:spMkLst>
+            <pc:docMk/>
+            <pc:sldMk cId="1827292579" sldId="260"/>
+            <ac:spMk id="4" creationId="{7021D4B7-2F3E-574B-10F4-5B9032CC925E}"/>
+          </ac:spMkLst>
+        </pc:spChg>
+      </pc:sldChg>
+    </pc:docChg>
+  </pc:docChgLst>
+</pc:chgInfo>
 </file>
 
 <file path=ppt/slideLayouts/slideLayout1.xml><?xml version="1.0" encoding="utf-8"?>
@@ -256,7 +346,7 @@
           <a:p>
             <a:fld id="{24D807AE-4CCF-4454-8580-C2BD5F26B0B8}" type="datetimeFigureOut">
               <a:rPr kumimoji="1" lang="ja-JP" altLang="en-US" smtClean="0"/>
-              <a:t>2026/3/8</a:t>
+              <a:t>2026/3/13</a:t>
             </a:fld>
             <a:endParaRPr kumimoji="1" lang="ja-JP" altLang="en-US"/>
           </a:p>
@@ -486,7 +576,7 @@
           <a:p>
             <a:fld id="{24D807AE-4CCF-4454-8580-C2BD5F26B0B8}" type="datetimeFigureOut">
               <a:rPr kumimoji="1" lang="ja-JP" altLang="en-US" smtClean="0"/>
-              <a:t>2026/3/8</a:t>
+              <a:t>2026/3/13</a:t>
             </a:fld>
             <a:endParaRPr kumimoji="1" lang="ja-JP" altLang="en-US"/>
           </a:p>
@@ -726,7 +816,7 @@
           <a:p>
             <a:fld id="{24D807AE-4CCF-4454-8580-C2BD5F26B0B8}" type="datetimeFigureOut">
               <a:rPr kumimoji="1" lang="ja-JP" altLang="en-US" smtClean="0"/>
-              <a:t>2026/3/8</a:t>
+              <a:t>2026/3/13</a:t>
             </a:fld>
             <a:endParaRPr kumimoji="1" lang="ja-JP" altLang="en-US"/>
           </a:p>
@@ -956,7 +1046,7 @@
           <a:p>
             <a:fld id="{24D807AE-4CCF-4454-8580-C2BD5F26B0B8}" type="datetimeFigureOut">
               <a:rPr kumimoji="1" lang="ja-JP" altLang="en-US" smtClean="0"/>
-              <a:t>2026/3/8</a:t>
+              <a:t>2026/3/13</a:t>
             </a:fld>
             <a:endParaRPr kumimoji="1" lang="ja-JP" altLang="en-US"/>
           </a:p>
@@ -1231,7 +1321,7 @@
           <a:p>
             <a:fld id="{24D807AE-4CCF-4454-8580-C2BD5F26B0B8}" type="datetimeFigureOut">
               <a:rPr kumimoji="1" lang="ja-JP" altLang="en-US" smtClean="0"/>
-              <a:t>2026/3/8</a:t>
+              <a:t>2026/3/13</a:t>
             </a:fld>
             <a:endParaRPr kumimoji="1" lang="ja-JP" altLang="en-US"/>
           </a:p>
@@ -1560,7 +1650,7 @@
           <a:p>
             <a:fld id="{24D807AE-4CCF-4454-8580-C2BD5F26B0B8}" type="datetimeFigureOut">
               <a:rPr kumimoji="1" lang="ja-JP" altLang="en-US" smtClean="0"/>
-              <a:t>2026/3/8</a:t>
+              <a:t>2026/3/13</a:t>
             </a:fld>
             <a:endParaRPr kumimoji="1" lang="ja-JP" altLang="en-US"/>
           </a:p>
@@ -2036,7 +2126,7 @@
           <a:p>
             <a:fld id="{24D807AE-4CCF-4454-8580-C2BD5F26B0B8}" type="datetimeFigureOut">
               <a:rPr kumimoji="1" lang="ja-JP" altLang="en-US" smtClean="0"/>
-              <a:t>2026/3/8</a:t>
+              <a:t>2026/3/13</a:t>
             </a:fld>
             <a:endParaRPr kumimoji="1" lang="ja-JP" altLang="en-US"/>
           </a:p>
@@ -2177,7 +2267,7 @@
           <a:p>
             <a:fld id="{24D807AE-4CCF-4454-8580-C2BD5F26B0B8}" type="datetimeFigureOut">
               <a:rPr kumimoji="1" lang="ja-JP" altLang="en-US" smtClean="0"/>
-              <a:t>2026/3/8</a:t>
+              <a:t>2026/3/13</a:t>
             </a:fld>
             <a:endParaRPr kumimoji="1" lang="ja-JP" altLang="en-US"/>
           </a:p>
@@ -2290,7 +2380,7 @@
           <a:p>
             <a:fld id="{24D807AE-4CCF-4454-8580-C2BD5F26B0B8}" type="datetimeFigureOut">
               <a:rPr kumimoji="1" lang="ja-JP" altLang="en-US" smtClean="0"/>
-              <a:t>2026/3/8</a:t>
+              <a:t>2026/3/13</a:t>
             </a:fld>
             <a:endParaRPr kumimoji="1" lang="ja-JP" altLang="en-US"/>
           </a:p>
@@ -2633,7 +2723,7 @@
           <a:p>
             <a:fld id="{24D807AE-4CCF-4454-8580-C2BD5F26B0B8}" type="datetimeFigureOut">
               <a:rPr kumimoji="1" lang="ja-JP" altLang="en-US" smtClean="0"/>
-              <a:t>2026/3/8</a:t>
+              <a:t>2026/3/13</a:t>
             </a:fld>
             <a:endParaRPr kumimoji="1" lang="ja-JP" altLang="en-US"/>
           </a:p>
@@ -2921,7 +3011,7 @@
           <a:p>
             <a:fld id="{24D807AE-4CCF-4454-8580-C2BD5F26B0B8}" type="datetimeFigureOut">
               <a:rPr kumimoji="1" lang="ja-JP" altLang="en-US" smtClean="0"/>
-              <a:t>2026/3/8</a:t>
+              <a:t>2026/3/13</a:t>
             </a:fld>
             <a:endParaRPr kumimoji="1" lang="ja-JP" altLang="en-US"/>
           </a:p>
@@ -3194,7 +3284,7 @@
           <a:p>
             <a:fld id="{24D807AE-4CCF-4454-8580-C2BD5F26B0B8}" type="datetimeFigureOut">
               <a:rPr kumimoji="1" lang="ja-JP" altLang="en-US" smtClean="0"/>
-              <a:t>2026/3/8</a:t>
+              <a:t>2026/3/13</a:t>
             </a:fld>
             <a:endParaRPr kumimoji="1" lang="ja-JP" altLang="en-US"/>
           </a:p>
@@ -3971,6 +4061,358 @@
   <p:cSld>
     <p:spTree>
       <p:nvGrpSpPr>
+        <p:cNvPr id="1" name="">
+          <a:extLst>
+            <a:ext uri="{FF2B5EF4-FFF2-40B4-BE49-F238E27FC236}">
+              <a16:creationId xmlns:a16="http://schemas.microsoft.com/office/drawing/2014/main" id="{304ED8B6-5A8C-B47F-4B82-845E4D8CAA98}"/>
+            </a:ext>
+          </a:extLst>
+        </p:cNvPr>
+        <p:cNvGrpSpPr/>
+        <p:nvPr/>
+      </p:nvGrpSpPr>
+      <p:grpSpPr>
+        <a:xfrm>
+          <a:off x="0" y="0"/>
+          <a:ext cx="0" cy="0"/>
+          <a:chOff x="0" y="0"/>
+          <a:chExt cx="0" cy="0"/>
+        </a:xfrm>
+      </p:grpSpPr>
+      <p:sp>
+        <p:nvSpPr>
+          <p:cNvPr id="4" name="吹き出し: 円形 3">
+            <a:extLst>
+              <a:ext uri="{FF2B5EF4-FFF2-40B4-BE49-F238E27FC236}">
+                <a16:creationId xmlns:a16="http://schemas.microsoft.com/office/drawing/2014/main" id="{1CB185F5-1410-683C-385B-278E90D55837}"/>
+              </a:ext>
+            </a:extLst>
+          </p:cNvPr>
+          <p:cNvSpPr/>
+          <p:nvPr/>
+        </p:nvSpPr>
+        <p:spPr>
+          <a:xfrm>
+            <a:off x="1657350" y="1420586"/>
+            <a:ext cx="2911929" cy="1575707"/>
+          </a:xfrm>
+          <a:prstGeom prst="wedgeEllipseCallout">
+            <a:avLst>
+              <a:gd name="adj1" fmla="val -84443"/>
+              <a:gd name="adj2" fmla="val -74288"/>
+            </a:avLst>
+          </a:prstGeom>
+        </p:spPr>
+        <p:style>
+          <a:lnRef idx="2">
+            <a:schemeClr val="dk1"/>
+          </a:lnRef>
+          <a:fillRef idx="1">
+            <a:schemeClr val="lt1"/>
+          </a:fillRef>
+          <a:effectRef idx="0">
+            <a:schemeClr val="dk1"/>
+          </a:effectRef>
+          <a:fontRef idx="minor">
+            <a:schemeClr val="dk1"/>
+          </a:fontRef>
+        </p:style>
+        <p:txBody>
+          <a:bodyPr rtlCol="0" anchor="ctr"/>
+          <a:lstStyle/>
+          <a:p>
+            <a:pPr algn="ctr"/>
+            <a:r>
+              <a:rPr kumimoji="1" lang="ja-JP" altLang="en-US" dirty="0"/>
+              <a:t>あのかべ、</a:t>
+            </a:r>
+            <a:r>
+              <a:rPr lang="ja-JP" altLang="en-US" dirty="0"/>
+              <a:t>あか</a:t>
+            </a:r>
+            <a:r>
+              <a:rPr kumimoji="1" lang="ja-JP" altLang="en-US" dirty="0"/>
+              <a:t>く ぬって</a:t>
+            </a:r>
+            <a:r>
+              <a:rPr kumimoji="1" lang="en-US" altLang="ja-JP" dirty="0"/>
+              <a:t>!</a:t>
+            </a:r>
+            <a:endParaRPr kumimoji="1" lang="ja-JP" altLang="en-US" dirty="0"/>
+          </a:p>
+        </p:txBody>
+      </p:sp>
+      <p:pic>
+        <p:nvPicPr>
+          <p:cNvPr id="6" name="図 5" descr="ゲームのキャラクター&#10;&#10;AI によって生成されたコンテンツは間違っている可能性があります。">
+            <a:extLst>
+              <a:ext uri="{FF2B5EF4-FFF2-40B4-BE49-F238E27FC236}">
+                <a16:creationId xmlns:a16="http://schemas.microsoft.com/office/drawing/2014/main" id="{6D7B9754-B3C1-29F0-920F-0BEC947B22EC}"/>
+              </a:ext>
+            </a:extLst>
+          </p:cNvPr>
+          <p:cNvPicPr>
+            <a:picLocks noChangeAspect="1"/>
+          </p:cNvPicPr>
+          <p:nvPr/>
+        </p:nvPicPr>
+        <p:blipFill>
+          <a:blip r:embed="rId2">
+            <a:extLst>
+              <a:ext uri="{28A0092B-C50C-407E-A947-70E740481C1C}">
+                <a14:useLocalDpi xmlns:a14="http://schemas.microsoft.com/office/drawing/2010/main" val="0"/>
+              </a:ext>
+            </a:extLst>
+          </a:blip>
+          <a:stretch>
+            <a:fillRect/>
+          </a:stretch>
+        </p:blipFill>
+        <p:spPr>
+          <a:xfrm>
+            <a:off x="4905375" y="1228725"/>
+            <a:ext cx="2381250" cy="4286250"/>
+          </a:xfrm>
+          <a:prstGeom prst="rect">
+            <a:avLst/>
+          </a:prstGeom>
+        </p:spPr>
+      </p:pic>
+      <p:sp>
+        <p:nvSpPr>
+          <p:cNvPr id="7" name="吹き出し: 円形 6">
+            <a:extLst>
+              <a:ext uri="{FF2B5EF4-FFF2-40B4-BE49-F238E27FC236}">
+                <a16:creationId xmlns:a16="http://schemas.microsoft.com/office/drawing/2014/main" id="{DEDD9E04-762E-151B-28E2-0CD7D42C7B61}"/>
+              </a:ext>
+            </a:extLst>
+          </p:cNvPr>
+          <p:cNvSpPr/>
+          <p:nvPr/>
+        </p:nvSpPr>
+        <p:spPr>
+          <a:xfrm>
+            <a:off x="1592036" y="3861707"/>
+            <a:ext cx="2977243" cy="1575707"/>
+          </a:xfrm>
+          <a:prstGeom prst="wedgeEllipseCallout">
+            <a:avLst>
+              <a:gd name="adj1" fmla="val -80893"/>
+              <a:gd name="adj2" fmla="val 85298"/>
+            </a:avLst>
+          </a:prstGeom>
+          <a:ln>
+            <a:prstDash val="solid"/>
+          </a:ln>
+        </p:spPr>
+        <p:style>
+          <a:lnRef idx="2">
+            <a:schemeClr val="accent1"/>
+          </a:lnRef>
+          <a:fillRef idx="1">
+            <a:schemeClr val="lt1"/>
+          </a:fillRef>
+          <a:effectRef idx="0">
+            <a:schemeClr val="accent1"/>
+          </a:effectRef>
+          <a:fontRef idx="minor">
+            <a:schemeClr val="dk1"/>
+          </a:fontRef>
+        </p:style>
+        <p:txBody>
+          <a:bodyPr rtlCol="0" anchor="ctr"/>
+          <a:lstStyle/>
+          <a:p>
+            <a:pPr algn="ctr"/>
+            <a:r>
+              <a:rPr kumimoji="1" lang="ja-JP" altLang="en-US" dirty="0"/>
+              <a:t>このドキュメント、しばらく </a:t>
+            </a:r>
+            <a:endParaRPr kumimoji="1" lang="en-US" altLang="ja-JP" dirty="0"/>
+          </a:p>
+          <a:p>
+            <a:pPr algn="ctr"/>
+            <a:r>
+              <a:rPr kumimoji="1" lang="ja-JP" altLang="en-US" dirty="0"/>
+              <a:t>あずかって</a:t>
+            </a:r>
+            <a:r>
+              <a:rPr kumimoji="1" lang="en-US" altLang="ja-JP" dirty="0"/>
+              <a:t>!</a:t>
+            </a:r>
+            <a:endParaRPr kumimoji="1" lang="ja-JP" altLang="en-US" dirty="0"/>
+          </a:p>
+        </p:txBody>
+      </p:sp>
+      <p:sp>
+        <p:nvSpPr>
+          <p:cNvPr id="9" name="吹き出し: 円形 8">
+            <a:extLst>
+              <a:ext uri="{FF2B5EF4-FFF2-40B4-BE49-F238E27FC236}">
+                <a16:creationId xmlns:a16="http://schemas.microsoft.com/office/drawing/2014/main" id="{EBABEC24-B9D7-A156-3E48-3CA509B18E76}"/>
+              </a:ext>
+            </a:extLst>
+          </p:cNvPr>
+          <p:cNvSpPr/>
+          <p:nvPr/>
+        </p:nvSpPr>
+        <p:spPr>
+          <a:xfrm>
+            <a:off x="7622721" y="4520293"/>
+            <a:ext cx="3864429" cy="1575707"/>
+          </a:xfrm>
+          <a:prstGeom prst="wedgeEllipseCallout">
+            <a:avLst>
+              <a:gd name="adj1" fmla="val 54906"/>
+              <a:gd name="adj2" fmla="val 79599"/>
+            </a:avLst>
+          </a:prstGeom>
+        </p:spPr>
+        <p:style>
+          <a:lnRef idx="2">
+            <a:schemeClr val="accent6"/>
+          </a:lnRef>
+          <a:fillRef idx="1">
+            <a:schemeClr val="lt1"/>
+          </a:fillRef>
+          <a:effectRef idx="0">
+            <a:schemeClr val="accent6"/>
+          </a:effectRef>
+          <a:fontRef idx="minor">
+            <a:schemeClr val="dk1"/>
+          </a:fontRef>
+        </p:style>
+        <p:txBody>
+          <a:bodyPr rtlCol="0" anchor="ctr"/>
+          <a:lstStyle/>
+          <a:p>
+            <a:pPr algn="ctr"/>
+            <a:r>
+              <a:rPr kumimoji="1" lang="ja-JP" altLang="en-US" dirty="0"/>
+              <a:t>この</a:t>
+            </a:r>
+            <a:r>
+              <a:rPr lang="ja-JP" altLang="en-US" dirty="0"/>
+              <a:t>ぶひん</a:t>
+            </a:r>
+            <a:r>
+              <a:rPr kumimoji="1" lang="ja-JP" altLang="en-US" dirty="0"/>
+              <a:t>、こうじょうに もっていって</a:t>
+            </a:r>
+            <a:r>
+              <a:rPr kumimoji="1" lang="en-US" altLang="ja-JP" dirty="0"/>
+              <a:t>!</a:t>
+            </a:r>
+            <a:endParaRPr kumimoji="1" lang="ja-JP" altLang="en-US" dirty="0"/>
+          </a:p>
+        </p:txBody>
+      </p:sp>
+      <p:sp>
+        <p:nvSpPr>
+          <p:cNvPr id="10" name="思考の吹き出し: 雲形 9">
+            <a:extLst>
+              <a:ext uri="{FF2B5EF4-FFF2-40B4-BE49-F238E27FC236}">
+                <a16:creationId xmlns:a16="http://schemas.microsoft.com/office/drawing/2014/main" id="{EE8E500C-9AF2-9591-0F56-AED224727E98}"/>
+              </a:ext>
+            </a:extLst>
+          </p:cNvPr>
+          <p:cNvSpPr/>
+          <p:nvPr/>
+        </p:nvSpPr>
+        <p:spPr>
+          <a:xfrm>
+            <a:off x="7622721" y="644980"/>
+            <a:ext cx="4182836" cy="2939142"/>
+          </a:xfrm>
+          <a:prstGeom prst="cloudCallout">
+            <a:avLst>
+              <a:gd name="adj1" fmla="val -71104"/>
+              <a:gd name="adj2" fmla="val -2583"/>
+            </a:avLst>
+          </a:prstGeom>
+        </p:spPr>
+        <p:style>
+          <a:lnRef idx="2">
+            <a:schemeClr val="accent1">
+              <a:shade val="15000"/>
+            </a:schemeClr>
+          </a:lnRef>
+          <a:fillRef idx="1">
+            <a:schemeClr val="accent1"/>
+          </a:fillRef>
+          <a:effectRef idx="0">
+            <a:schemeClr val="accent1"/>
+          </a:effectRef>
+          <a:fontRef idx="minor">
+            <a:schemeClr val="lt1"/>
+          </a:fontRef>
+        </p:style>
+        <p:txBody>
+          <a:bodyPr rtlCol="0" anchor="ctr"/>
+          <a:lstStyle/>
+          <a:p>
+            <a:pPr algn="ctr"/>
+            <a:r>
+              <a:rPr lang="ja-JP" altLang="en-US" dirty="0"/>
+              <a:t>わたし</a:t>
+            </a:r>
+            <a:r>
+              <a:rPr kumimoji="1" lang="ja-JP" altLang="en-US" dirty="0"/>
+              <a:t>は オブジェクト</a:t>
+            </a:r>
+            <a:r>
+              <a:rPr lang="ja-JP" altLang="en-US" dirty="0"/>
+              <a:t>です。</a:t>
+            </a:r>
+            <a:endParaRPr lang="en-US" altLang="ja-JP" dirty="0"/>
+          </a:p>
+          <a:p>
+            <a:pPr algn="ctr"/>
+            <a:r>
+              <a:rPr kumimoji="1" lang="ja-JP" altLang="en-US" dirty="0"/>
+              <a:t>しごとの </a:t>
+            </a:r>
+            <a:r>
+              <a:rPr lang="ja-JP" altLang="en-US" dirty="0"/>
+              <a:t>いらい</a:t>
+            </a:r>
+            <a:r>
+              <a:rPr kumimoji="1" lang="ja-JP" altLang="en-US" dirty="0"/>
+              <a:t>、</a:t>
+            </a:r>
+            <a:endParaRPr kumimoji="1" lang="en-US" altLang="ja-JP" dirty="0"/>
+          </a:p>
+          <a:p>
+            <a:pPr algn="ctr"/>
+            <a:r>
+              <a:rPr lang="ja-JP" altLang="en-US" dirty="0"/>
+              <a:t>う</a:t>
+            </a:r>
+            <a:r>
+              <a:rPr kumimoji="1" lang="ja-JP" altLang="en-US" dirty="0"/>
+              <a:t>けますよ！</a:t>
+            </a:r>
+          </a:p>
+        </p:txBody>
+      </p:sp>
+    </p:spTree>
+    <p:extLst>
+      <p:ext uri="{BB962C8B-B14F-4D97-AF65-F5344CB8AC3E}">
+        <p14:creationId xmlns:p14="http://schemas.microsoft.com/office/powerpoint/2010/main" val="473636867"/>
+      </p:ext>
+    </p:extLst>
+  </p:cSld>
+  <p:clrMapOvr>
+    <a:masterClrMapping/>
+  </p:clrMapOvr>
+</p:sld>
+</file>
+
+<file path=ppt/slides/slide4.xml><?xml version="1.0" encoding="utf-8"?>
+<p:sld xmlns:a="http://schemas.openxmlformats.org/drawingml/2006/main" xmlns:r="http://schemas.openxmlformats.org/officeDocument/2006/relationships" xmlns:p="http://schemas.openxmlformats.org/presentationml/2006/main">
+  <p:cSld>
+    <p:spTree>
+      <p:nvGrpSpPr>
         <p:cNvPr id="1" name=""/>
         <p:cNvGrpSpPr/>
         <p:nvPr/>
@@ -4117,6 +4559,180 @@
     <p:extLst>
       <p:ext uri="{BB962C8B-B14F-4D97-AF65-F5344CB8AC3E}">
         <p14:creationId xmlns:p14="http://schemas.microsoft.com/office/powerpoint/2010/main" val="3770066373"/>
+      </p:ext>
+    </p:extLst>
+  </p:cSld>
+  <p:clrMapOvr>
+    <a:masterClrMapping/>
+  </p:clrMapOvr>
+</p:sld>
+</file>
+
+<file path=ppt/slides/slide5.xml><?xml version="1.0" encoding="utf-8"?>
+<p:sld xmlns:a="http://schemas.openxmlformats.org/drawingml/2006/main" xmlns:r="http://schemas.openxmlformats.org/officeDocument/2006/relationships" xmlns:p="http://schemas.openxmlformats.org/presentationml/2006/main">
+  <p:cSld>
+    <p:spTree>
+      <p:nvGrpSpPr>
+        <p:cNvPr id="1" name="">
+          <a:extLst>
+            <a:ext uri="{FF2B5EF4-FFF2-40B4-BE49-F238E27FC236}">
+              <a16:creationId xmlns:a16="http://schemas.microsoft.com/office/drawing/2014/main" id="{56832C1C-818C-C2BF-27AD-87DA488A7FEF}"/>
+            </a:ext>
+          </a:extLst>
+        </p:cNvPr>
+        <p:cNvGrpSpPr/>
+        <p:nvPr/>
+      </p:nvGrpSpPr>
+      <p:grpSpPr>
+        <a:xfrm>
+          <a:off x="0" y="0"/>
+          <a:ext cx="0" cy="0"/>
+          <a:chOff x="0" y="0"/>
+          <a:chExt cx="0" cy="0"/>
+        </a:xfrm>
+      </p:grpSpPr>
+      <p:pic>
+        <p:nvPicPr>
+          <p:cNvPr id="3" name="図 2" descr="おもちゃ, 人形, 立つ, 衣類 が含まれている画像&#10;&#10;AI によって生成されたコンテンツは間違っている可能性があります。">
+            <a:extLst>
+              <a:ext uri="{FF2B5EF4-FFF2-40B4-BE49-F238E27FC236}">
+                <a16:creationId xmlns:a16="http://schemas.microsoft.com/office/drawing/2014/main" id="{FDD4F444-BC82-234C-796D-5E9A0777131A}"/>
+              </a:ext>
+            </a:extLst>
+          </p:cNvPr>
+          <p:cNvPicPr>
+            <a:picLocks noChangeAspect="1"/>
+          </p:cNvPicPr>
+          <p:nvPr/>
+        </p:nvPicPr>
+        <p:blipFill>
+          <a:blip r:embed="rId2">
+            <a:extLst>
+              <a:ext uri="{28A0092B-C50C-407E-A947-70E740481C1C}">
+                <a14:useLocalDpi xmlns:a14="http://schemas.microsoft.com/office/drawing/2010/main" val="0"/>
+              </a:ext>
+            </a:extLst>
+          </a:blip>
+          <a:stretch>
+            <a:fillRect/>
+          </a:stretch>
+        </p:blipFill>
+        <p:spPr>
+          <a:xfrm>
+            <a:off x="4090307" y="1632176"/>
+            <a:ext cx="7620000" cy="5095875"/>
+          </a:xfrm>
+          <a:prstGeom prst="rect">
+            <a:avLst/>
+          </a:prstGeom>
+        </p:spPr>
+      </p:pic>
+      <p:sp>
+        <p:nvSpPr>
+          <p:cNvPr id="4" name="吹き出し: 円形 3">
+            <a:extLst>
+              <a:ext uri="{FF2B5EF4-FFF2-40B4-BE49-F238E27FC236}">
+                <a16:creationId xmlns:a16="http://schemas.microsoft.com/office/drawing/2014/main" id="{7021D4B7-2F3E-574B-10F4-5B9032CC925E}"/>
+              </a:ext>
+            </a:extLst>
+          </p:cNvPr>
+          <p:cNvSpPr/>
+          <p:nvPr/>
+        </p:nvSpPr>
+        <p:spPr>
+          <a:xfrm>
+            <a:off x="673331" y="1020537"/>
+            <a:ext cx="3416976" cy="2408464"/>
+          </a:xfrm>
+          <a:prstGeom prst="wedgeEllipseCallout">
+            <a:avLst>
+              <a:gd name="adj1" fmla="val -62458"/>
+              <a:gd name="adj2" fmla="val -51064"/>
+            </a:avLst>
+          </a:prstGeom>
+        </p:spPr>
+        <p:style>
+          <a:lnRef idx="2">
+            <a:schemeClr val="dk1"/>
+          </a:lnRef>
+          <a:fillRef idx="1">
+            <a:schemeClr val="lt1"/>
+          </a:fillRef>
+          <a:effectRef idx="0">
+            <a:schemeClr val="dk1"/>
+          </a:effectRef>
+          <a:fontRef idx="minor">
+            <a:schemeClr val="dk1"/>
+          </a:fontRef>
+        </p:style>
+        <p:txBody>
+          <a:bodyPr rtlCol="0" anchor="ctr"/>
+          <a:lstStyle/>
+          <a:p>
+            <a:pPr algn="ctr"/>
+            <a:r>
+              <a:rPr lang="ja-JP" altLang="en-US" dirty="0"/>
+              <a:t>えっと、このしごと、</a:t>
+            </a:r>
+            <a:endParaRPr lang="en-US" altLang="ja-JP" dirty="0"/>
+          </a:p>
+          <a:p>
+            <a:pPr algn="ctr"/>
+            <a:r>
+              <a:rPr lang="ja-JP" altLang="en-US" dirty="0"/>
+              <a:t>だれに たのめば </a:t>
+            </a:r>
+            <a:endParaRPr lang="en-US" altLang="ja-JP" dirty="0"/>
+          </a:p>
+          <a:p>
+            <a:pPr algn="ctr"/>
+            <a:r>
+              <a:rPr lang="ja-JP" altLang="en-US" dirty="0"/>
+              <a:t>いいんだっけ？</a:t>
+            </a:r>
+            <a:endParaRPr kumimoji="1" lang="ja-JP" altLang="en-US" dirty="0"/>
+          </a:p>
+        </p:txBody>
+      </p:sp>
+      <p:sp>
+        <p:nvSpPr>
+          <p:cNvPr id="5" name="テキスト ボックス 4">
+            <a:extLst>
+              <a:ext uri="{FF2B5EF4-FFF2-40B4-BE49-F238E27FC236}">
+                <a16:creationId xmlns:a16="http://schemas.microsoft.com/office/drawing/2014/main" id="{3E5C2B75-A65B-6BD3-2DB9-728962602E49}"/>
+              </a:ext>
+            </a:extLst>
+          </p:cNvPr>
+          <p:cNvSpPr txBox="1"/>
+          <p:nvPr/>
+        </p:nvSpPr>
+        <p:spPr>
+          <a:xfrm>
+            <a:off x="6884644" y="1026919"/>
+            <a:ext cx="2031325" cy="369332"/>
+          </a:xfrm>
+          <a:prstGeom prst="rect">
+            <a:avLst/>
+          </a:prstGeom>
+          <a:noFill/>
+        </p:spPr>
+        <p:txBody>
+          <a:bodyPr wrap="none" rtlCol="0">
+            <a:spAutoFit/>
+          </a:bodyPr>
+          <a:lstStyle/>
+          <a:p>
+            <a:r>
+              <a:rPr kumimoji="1" lang="ja-JP" altLang="en-US" dirty="0"/>
+              <a:t>オブジェクトたち</a:t>
+            </a:r>
+          </a:p>
+        </p:txBody>
+      </p:sp>
+    </p:spTree>
+    <p:extLst>
+      <p:ext uri="{BB962C8B-B14F-4D97-AF65-F5344CB8AC3E}">
+        <p14:creationId xmlns:p14="http://schemas.microsoft.com/office/powerpoint/2010/main" val="1827292579"/>
       </p:ext>
     </p:extLst>
   </p:cSld>
